--- a/docs/content/ggplot_1/ggplot_1_activity.pptx
+++ b/docs/content/ggplot_1/ggplot_1_activity.pptx
@@ -16,6 +16,7 @@
     <p:sldId id="264" r:id="rId10"/>
     <p:sldId id="265" r:id="rId11"/>
     <p:sldId id="266" r:id="rId12"/>
+    <p:sldId id="267" r:id="rId13"/>
   </p:sldIdLst>
   <p:sldSz cx="9144000" cy="5143500" type="screen16x9"/>
   <p:notesSz cx="6858000" cy="9144000"/>
@@ -3402,7 +3403,7 @@
             </a:pPr>
             <a:r>
               <a:rPr/>
-              <a:t>Getting unstuck</a:t>
+              <a:t>Extension — out of class (~30–40 min)</a:t>
             </a:r>
           </a:p>
         </p:txBody>
@@ -3422,16 +3423,135 @@
           <a:bodyPr/>
           <a:lstStyle/>
           <a:p>
+            <a:pPr lvl="0" indent="0" marL="0">
+              <a:buNone/>
+            </a:pPr>
+            <a:r>
+              <a:rPr i="1"/>
+              <a:t>Turn this in with your worksheet. In class you used one trick at a time (colors, facets, </a:t>
+            </a:r>
+            <a:r>
+              <a:rPr i="1">
+                <a:latin typeface="Courier"/>
+              </a:rPr>
+              <a:t>stat_summary</a:t>
+            </a:r>
+            <a:r>
+              <a:rPr i="1"/>
+              <a:t>). Now you combine two, with choices that are yours alone.</a:t>
+            </a:r>
+          </a:p>
+          <a:p>
+            <a:pPr lvl="0" indent="0" marL="1270000">
+              <a:buNone/>
+            </a:pPr>
+            <a:r>
+              <a:rPr sz="2000" b="1"/>
+              <a:t>Important</a:t>
+            </a:r>
+          </a:p>
+          <a:p>
+            <a:pPr lvl="0" indent="0" marL="1270000">
+              <a:buNone/>
+            </a:pPr>
+            <a:r>
+              <a:rPr sz="2000" b="1"/>
+              <a:t>E2 and E3 must be handwritten</a:t>
+            </a:r>
+            <a:r>
+              <a:rPr sz="2000"/>
+              <a:t> on paper, photographed, and embedded (</a:t>
+            </a:r>
+            <a:r>
+              <a:rPr sz="2000">
+                <a:latin typeface="Courier"/>
+              </a:rPr>
+              <a:t>![caption](my_photo.jpg)</a:t>
+            </a:r>
+            <a:r>
+              <a:rPr sz="2000"/>
+              <a:t>). Typed answers to E2/E3 get </a:t>
+            </a:r>
+            <a:r>
+              <a:rPr sz="2000" b="1"/>
+              <a:t>at most half credit, even if correct</a:t>
+            </a:r>
+            <a:r>
+              <a:rPr sz="2000"/>
+              <a:t> — I want your own sketch and your own reasoning about </a:t>
+            </a:r>
+            <a:r>
+              <a:rPr sz="2000" i="1"/>
+              <a:t>your own</a:t>
+            </a:r>
+            <a:r>
+              <a:rPr sz="2000"/>
+              <a:t> plot.</a:t>
+            </a:r>
+          </a:p>
+          <a:p>
+            <a:pPr lvl="0" indent="0" marL="0">
+              <a:spcBef>
+                <a:spcPts val="3000"/>
+              </a:spcBef>
+              <a:buNone/>
+            </a:pPr>
+            <a:r>
+              <a:rPr b="1"/>
+              <a:t>E1 · Your own combo plot (4 pts)</a:t>
+            </a:r>
+          </a:p>
+          <a:p>
             <a:pPr lvl="0" indent="-342900" marL="342900">
               <a:buAutoNum type="arabicPeriod"/>
             </a:pPr>
             <a:r>
               <a:rPr b="1"/>
-              <a:t>Read the error message out loud.</a:t>
+              <a:t>Pick your own two colors</a:t>
             </a:r>
             <a:r>
               <a:rPr/>
-              <a:t> R usually names the line and the problem.</a:t>
+              <a:t> for </a:t>
+            </a:r>
+            <a:r>
+              <a:rPr>
+                <a:latin typeface="Courier"/>
+              </a:rPr>
+              <a:t>sunny</a:t>
+            </a:r>
+            <a:r>
+              <a:rPr/>
+              <a:t> and </a:t>
+            </a:r>
+            <a:r>
+              <a:rPr>
+                <a:latin typeface="Courier"/>
+              </a:rPr>
+              <a:t>shady</a:t>
+            </a:r>
+            <a:r>
+              <a:rPr/>
+              <a:t> — not </a:t>
+            </a:r>
+            <a:r>
+              <a:rPr>
+                <a:latin typeface="Courier"/>
+              </a:rPr>
+              <a:t>"goldenrod"</a:t>
+            </a:r>
+            <a:r>
+              <a:rPr/>
+              <a:t>/</a:t>
+            </a:r>
+            <a:r>
+              <a:rPr>
+                <a:latin typeface="Courier"/>
+              </a:rPr>
+              <a:t>"forestgreen"</a:t>
+            </a:r>
+            <a:r>
+              <a:rPr/>
+              <a:t>, and not the same pair as your neighbour.</a:t>
             </a:r>
           </a:p>
           <a:p>
@@ -3439,48 +3559,56 @@
               <a:buAutoNum type="arabicPeriod"/>
             </a:pPr>
             <a:r>
+              <a:rPr/>
+              <a:t>Build a </a:t>
+            </a:r>
+            <a:r>
+              <a:rPr b="1"/>
+              <a:t>mean ± SE</a:t>
+            </a:r>
+            <a:r>
+              <a:rPr/>
+              <a:t> plot (two </a:t>
+            </a:r>
+            <a:r>
+              <a:rPr>
+                <a:latin typeface="Courier"/>
+              </a:rPr>
+              <a:t>stat_summary()</a:t>
+            </a:r>
+            <a:r>
+              <a:rPr/>
+              <a:t> layers) of </a:t>
+            </a:r>
+            <a:r>
               <a:rPr b="1">
                 <a:latin typeface="Courier"/>
               </a:rPr>
-              <a:t>%&gt;%</a:t>
-            </a:r>
-            <a:r>
-              <a:rPr b="1"/>
-              <a:t> or </a:t>
-            </a:r>
-            <a:r>
-              <a:rPr b="1">
-                <a:latin typeface="Courier"/>
-              </a:rPr>
-              <a:t>+</a:t>
-            </a:r>
-            <a:r>
-              <a:rPr b="1"/>
-              <a:t>?</a:t>
+              <a:t>width_cm</a:t>
             </a:r>
             <a:r>
               <a:rPr/>
-              <a:t> Data steps use </a:t>
-            </a:r>
-            <a:r>
-              <a:rPr>
-                <a:latin typeface="Courier"/>
-              </a:rPr>
-              <a:t>%&gt;%</a:t>
+              <a:t> by </a:t>
+            </a:r>
+            <a:r>
+              <a:rPr>
+                <a:latin typeface="Courier"/>
+              </a:rPr>
+              <a:t>side</a:t>
             </a:r>
             <a:r>
               <a:rPr/>
-              <a:t>. Plot layers use </a:t>
-            </a:r>
-            <a:r>
-              <a:rPr>
-                <a:latin typeface="Courier"/>
-              </a:rPr>
-              <a:t>+</a:t>
+              <a:t>, using your two colors with </a:t>
+            </a:r>
+            <a:r>
+              <a:rPr>
+                <a:latin typeface="Courier"/>
+              </a:rPr>
+              <a:t>scale_color_manual()</a:t>
             </a:r>
             <a:r>
               <a:rPr/>
-              <a:t>. Mixing them is the #1 ggplot error.</a:t>
+              <a:t>, raw jittered points behind.</a:t>
             </a:r>
           </a:p>
           <a:p>
@@ -3488,22 +3616,94 @@
               <a:buAutoNum type="arabicPeriod"/>
             </a:pPr>
             <a:r>
+              <a:rPr/>
+              <a:t>Add </a:t>
+            </a:r>
+            <a:r>
+              <a:rPr>
+                <a:latin typeface="Courier"/>
+              </a:rPr>
+              <a:t>facet_wrap(~ side)</a:t>
+            </a:r>
+            <a:r>
+              <a:rPr/>
+              <a:t> to that same plot — faceting by the variable you already coloured by is a bit redundant; do it anyway and watch what happens to the x-axis.</a:t>
+            </a:r>
+          </a:p>
+          <a:p>
+            <a:pPr lvl="0" indent="0" marL="0">
+              <a:buNone/>
+            </a:pPr>
+            <a:r>
+              <a:rPr/>
+              <a:t>Save it to </a:t>
+            </a:r>
+            <a:r>
+              <a:rPr>
+                <a:latin typeface="Courier"/>
+              </a:rPr>
+              <a:t>figures/</a:t>
+            </a:r>
+            <a:r>
+              <a:rPr/>
+              <a:t> at </a:t>
+            </a:r>
+            <a:r>
+              <a:rPr>
+                <a:latin typeface="Courier"/>
+              </a:rPr>
+              <a:t>dpi = 300</a:t>
+            </a:r>
+            <a:r>
+              <a:rPr/>
+              <a:t>. Record the exact R colour names you chose.</a:t>
+            </a:r>
+          </a:p>
+          <a:p>
+            <a:pPr lvl="0" indent="0" marL="0">
+              <a:spcBef>
+                <a:spcPts val="3000"/>
+              </a:spcBef>
+              <a:buNone/>
+            </a:pPr>
+            <a:r>
               <a:rPr b="1"/>
-              <a:t>Color not showing up?</a:t>
+              <a:t>E2 · Predict, then check — ✍️ by hand (3 pts)</a:t>
+            </a:r>
+          </a:p>
+          <a:p>
+            <a:pPr lvl="0" indent="0" marL="0">
+              <a:buNone/>
+            </a:pPr>
+            <a:r>
+              <a:rPr b="1"/>
+              <a:t>Before running E1:</a:t>
             </a:r>
             <a:r>
               <a:rPr/>
-              <a:t> Check that the names inside </a:t>
-            </a:r>
-            <a:r>
-              <a:rPr>
-                <a:latin typeface="Courier"/>
-              </a:rPr>
-              <a:t>scale_*_manual(values = c(...))</a:t>
+              <a:t> sketch the faceted mean ± SE plot — two panels, where you think each mean and its error bars sit, which colour goes where. Run the code, then underneath your sketch write 2–3 sentences: were you right about which side has more spread? Did faceting by </a:t>
+            </a:r>
+            <a:r>
+              <a:rPr>
+                <a:latin typeface="Courier"/>
+              </a:rPr>
+              <a:t>side</a:t>
             </a:r>
             <a:r>
               <a:rPr/>
-              <a:t> exactly match the values in your data — spelling and case both count.</a:t>
+              <a:t> look as redundant as you expected?</a:t>
+            </a:r>
+          </a:p>
+          <a:p>
+            <a:pPr lvl="0" indent="0" marL="0">
+              <a:spcBef>
+                <a:spcPts val="3000"/>
+              </a:spcBef>
+              <a:buNone/>
+            </a:pPr>
+            <a:r>
+              <a:rPr b="1"/>
+              <a:t>E3 · Explain it — ✍️ by hand, using YOUR plot (3 pts)</a:t>
             </a:r>
           </a:p>
           <a:p>
@@ -3511,18 +3711,18 @@
               <a:buAutoNum type="arabicPeriod"/>
             </a:pPr>
             <a:r>
-              <a:rPr b="1"/>
-              <a:t>Cheat sheets</a:t>
-            </a:r>
-            <a:r>
               <a:rPr/>
-              <a:t> — </a:t>
-            </a:r>
-            <a:r>
-              <a:rPr>
-                <a:hlinkClick r:id="rId2"/>
-              </a:rPr>
-              <a:t>https://posit.co/resources/cheatsheets/</a:t>
+              <a:t>Do your sunny and shady error bars overlap? Using their direction and rough size, what does that informally suggest about whether the sides differ in </a:t>
+            </a:r>
+            <a:r>
+              <a:rPr>
+                <a:latin typeface="Courier"/>
+              </a:rPr>
+              <a:t>width_cm</a:t>
+            </a:r>
+            <a:r>
+              <a:rPr/>
+              <a:t>?</a:t>
             </a:r>
           </a:p>
           <a:p>
@@ -3530,12 +3730,83 @@
               <a:buAutoNum type="arabicPeriod"/>
             </a:pPr>
             <a:r>
+              <a:rPr/>
+              <a:t>If you had written </a:t>
+            </a:r>
+            <a:r>
+              <a:rPr>
+                <a:latin typeface="Courier"/>
+              </a:rPr>
+              <a:t>"Shady"</a:t>
+            </a:r>
+            <a:r>
+              <a:rPr/>
+              <a:t> instead of </a:t>
+            </a:r>
+            <a:r>
+              <a:rPr>
+                <a:latin typeface="Courier"/>
+              </a:rPr>
+              <a:t>"shady"</a:t>
+            </a:r>
+            <a:r>
+              <a:rPr/>
+              <a:t> inside </a:t>
+            </a:r>
+            <a:r>
+              <a:rPr>
+                <a:latin typeface="Courier"/>
+              </a:rPr>
+              <a:t>scale_color_manual(values = c(...))</a:t>
+            </a:r>
+            <a:r>
+              <a:rPr/>
+              <a:t>, what would the plot have shown, and why does R treat those as different?</a:t>
+            </a:r>
+          </a:p>
+          <a:p>
+            <a:pPr lvl="0" indent="-342900" marL="342900">
+              <a:buAutoNum type="arabicPeriod"/>
+            </a:pPr>
+            <a:r>
+              <a:rPr/>
+              <a:t>In plain language, what does </a:t>
+            </a:r>
+            <a:r>
+              <a:rPr>
+                <a:latin typeface="Courier"/>
+              </a:rPr>
+              <a:t>facet_wrap()</a:t>
+            </a:r>
+            <a:r>
+              <a:rPr/>
+              <a:t> do to your </a:t>
+            </a:r>
+            <a:r>
               <a:rPr b="1"/>
-              <a:t>Bring the exact error</a:t>
+              <a:t>data</a:t>
             </a:r>
             <a:r>
               <a:rPr/>
-              <a:t> (copy-paste it) to class, Canvas, or office hours.</a:t>
+              <a:t> that </a:t>
+            </a:r>
+            <a:r>
+              <a:rPr>
+                <a:latin typeface="Courier"/>
+              </a:rPr>
+              <a:t>scale_color_manual()</a:t>
+            </a:r>
+            <a:r>
+              <a:rPr/>
+              <a:t> does </a:t>
+            </a:r>
+            <a:r>
+              <a:rPr b="1"/>
+              <a:t>not</a:t>
+            </a:r>
+            <a:r>
+              <a:rPr/>
+              <a:t> — and why does that distinction matter?</a:t>
             </a:r>
           </a:p>
         </p:txBody>
@@ -3546,6 +3817,191 @@
 </file>
 
 <file path=ppt/slides/slide11.xml><?xml version="1.0" encoding="utf-8"?>
+<p:sld xmlns:a="http://schemas.openxmlformats.org/drawingml/2006/main" xmlns:r="http://schemas.openxmlformats.org/officeDocument/2006/relationships" xmlns:p="http://schemas.openxmlformats.org/presentationml/2006/main">
+  <p:cSld>
+    <p:spTree>
+      <p:nvGrpSpPr>
+        <p:cNvPr id="1" name=""/>
+        <p:cNvGrpSpPr/>
+        <p:nvPr/>
+      </p:nvGrpSpPr>
+      <p:grpSpPr>
+        <a:xfrm>
+          <a:off x="0" y="0"/>
+          <a:ext cx="0" cy="0"/>
+          <a:chOff x="0" y="0"/>
+          <a:chExt cx="0" cy="0"/>
+        </a:xfrm>
+      </p:grpSpPr>
+      <p:sp>
+        <p:nvSpPr>
+          <p:cNvPr id="2" name="Title 1"/>
+          <p:cNvSpPr>
+            <a:spLocks noGrp="1"/>
+          </p:cNvSpPr>
+          <p:nvPr>
+            <p:ph type="title"/>
+          </p:nvPr>
+        </p:nvSpPr>
+        <p:spPr>
+          <a:xfrm>
+            <a:off x="0" y="0"/>
+            <a:ext cx="9144000" cy="582780"/>
+          </a:xfrm>
+        </p:spPr>
+        <p:txBody>
+          <a:bodyPr/>
+          <a:lstStyle/>
+          <a:p>
+            <a:pPr lvl="0" indent="0" marL="0">
+              <a:buNone/>
+            </a:pPr>
+            <a:r>
+              <a:rPr/>
+              <a:t>Getting unstuck</a:t>
+            </a:r>
+          </a:p>
+        </p:txBody>
+      </p:sp>
+      <p:sp>
+        <p:nvSpPr>
+          <p:cNvPr id="3" name="Content Placeholder 2"/>
+          <p:cNvSpPr>
+            <a:spLocks noGrp="1"/>
+          </p:cNvSpPr>
+          <p:nvPr>
+            <p:ph idx="1"/>
+          </p:nvPr>
+        </p:nvSpPr>
+        <p:spPr/>
+        <p:txBody>
+          <a:bodyPr/>
+          <a:lstStyle/>
+          <a:p>
+            <a:pPr lvl="0" indent="-342900" marL="342900">
+              <a:buAutoNum type="arabicPeriod"/>
+            </a:pPr>
+            <a:r>
+              <a:rPr b="1"/>
+              <a:t>Read the error message out loud.</a:t>
+            </a:r>
+            <a:r>
+              <a:rPr/>
+              <a:t> R usually names the line and the problem.</a:t>
+            </a:r>
+          </a:p>
+          <a:p>
+            <a:pPr lvl="0" indent="-342900" marL="342900">
+              <a:buAutoNum type="arabicPeriod"/>
+            </a:pPr>
+            <a:r>
+              <a:rPr b="1">
+                <a:latin typeface="Courier"/>
+              </a:rPr>
+              <a:t>%&gt;%</a:t>
+            </a:r>
+            <a:r>
+              <a:rPr b="1"/>
+              <a:t> or </a:t>
+            </a:r>
+            <a:r>
+              <a:rPr b="1">
+                <a:latin typeface="Courier"/>
+              </a:rPr>
+              <a:t>+</a:t>
+            </a:r>
+            <a:r>
+              <a:rPr b="1"/>
+              <a:t>?</a:t>
+            </a:r>
+            <a:r>
+              <a:rPr/>
+              <a:t> Data steps use </a:t>
+            </a:r>
+            <a:r>
+              <a:rPr>
+                <a:latin typeface="Courier"/>
+              </a:rPr>
+              <a:t>%&gt;%</a:t>
+            </a:r>
+            <a:r>
+              <a:rPr/>
+              <a:t>. Plot layers use </a:t>
+            </a:r>
+            <a:r>
+              <a:rPr>
+                <a:latin typeface="Courier"/>
+              </a:rPr>
+              <a:t>+</a:t>
+            </a:r>
+            <a:r>
+              <a:rPr/>
+              <a:t>. Mixing them is the #1 ggplot error.</a:t>
+            </a:r>
+          </a:p>
+          <a:p>
+            <a:pPr lvl="0" indent="-342900" marL="342900">
+              <a:buAutoNum type="arabicPeriod"/>
+            </a:pPr>
+            <a:r>
+              <a:rPr b="1"/>
+              <a:t>Color not showing up?</a:t>
+            </a:r>
+            <a:r>
+              <a:rPr/>
+              <a:t> Check that the names inside </a:t>
+            </a:r>
+            <a:r>
+              <a:rPr>
+                <a:latin typeface="Courier"/>
+              </a:rPr>
+              <a:t>scale_*_manual(values = c(...))</a:t>
+            </a:r>
+            <a:r>
+              <a:rPr/>
+              <a:t> exactly match the values in your data — spelling and case both count.</a:t>
+            </a:r>
+          </a:p>
+          <a:p>
+            <a:pPr lvl="0" indent="-342900" marL="342900">
+              <a:buAutoNum type="arabicPeriod"/>
+            </a:pPr>
+            <a:r>
+              <a:rPr b="1"/>
+              <a:t>Cheat sheets</a:t>
+            </a:r>
+            <a:r>
+              <a:rPr/>
+              <a:t> — </a:t>
+            </a:r>
+            <a:r>
+              <a:rPr>
+                <a:hlinkClick r:id="rId2"/>
+              </a:rPr>
+              <a:t>https://posit.co/resources/cheatsheets/</a:t>
+            </a:r>
+          </a:p>
+          <a:p>
+            <a:pPr lvl="0" indent="-342900" marL="342900">
+              <a:buAutoNum type="arabicPeriod"/>
+            </a:pPr>
+            <a:r>
+              <a:rPr b="1"/>
+              <a:t>Bring the exact error</a:t>
+            </a:r>
+            <a:r>
+              <a:rPr/>
+              <a:t> (copy-paste it) to class, Canvas, or office hours.</a:t>
+            </a:r>
+          </a:p>
+        </p:txBody>
+      </p:sp>
+    </p:spTree>
+  </p:cSld>
+</p:sld>
+</file>
+
+<file path=ppt/slides/slide12.xml><?xml version="1.0" encoding="utf-8"?>
 <p:sld xmlns:a="http://schemas.openxmlformats.org/drawingml/2006/main" xmlns:r="http://schemas.openxmlformats.org/officeDocument/2006/relationships" xmlns:p="http://schemas.openxmlformats.org/presentationml/2006/main">
   <p:cSld>
     <p:spTree>
@@ -3582,7 +4038,7 @@
             </a:pPr>
             <a:r>
               <a:rPr i="1"/>
-              <a:t>End of Worksheet 03. Next: Worksheet 04 continues with more geoms, </a:t>
+              <a:t>End of the GGplot I worksheet. Next: GGplot II — more geoms, </a:t>
             </a:r>
             <a:r>
               <a:rPr i="1">
